--- a/slides/discussion/03_search_discussion.pptx
+++ b/slides/discussion/03_search_discussion.pptx
@@ -5,7 +5,7 @@
     <p:sldMasterId id="2147483678" r:id="rId1"/>
   </p:sldMasterIdLst>
   <p:notesMasterIdLst>
-    <p:notesMasterId r:id="rId33"/>
+    <p:notesMasterId r:id="rId34"/>
   </p:notesMasterIdLst>
   <p:sldIdLst>
     <p:sldId id="257" r:id="rId2"/>
@@ -39,6 +39,7 @@
     <p:sldId id="404" r:id="rId30"/>
     <p:sldId id="387" r:id="rId31"/>
     <p:sldId id="448" r:id="rId32"/>
+    <p:sldId id="458" r:id="rId33"/>
   </p:sldIdLst>
   <p:sldSz cx="9144000" cy="6858000" type="screen4x3"/>
   <p:notesSz cx="7315200" cy="9601200"/>
@@ -22984,8 +22985,8 @@
           </a:p>
         </p:txBody>
       </p:sp>
-      <mc:AlternateContent xmlns:mc="http://schemas.openxmlformats.org/markup-compatibility/2006">
-        <mc:Choice xmlns:a14="http://schemas.microsoft.com/office/drawing/2010/main" Requires="a14">
+      <mc:AlternateContent xmlns:mc="http://schemas.openxmlformats.org/markup-compatibility/2006" xmlns:a14="http://schemas.microsoft.com/office/drawing/2010/main">
+        <mc:Choice Requires="a14">
           <p:sp>
             <p:nvSpPr>
               <p:cNvPr id="3" name="Content Placeholder 2">
@@ -23118,7 +23119,7 @@
             </p:txBody>
           </p:sp>
         </mc:Choice>
-        <mc:Fallback>
+        <mc:Fallback xmlns="">
           <p:sp>
             <p:nvSpPr>
               <p:cNvPr id="3" name="Content Placeholder 2">
@@ -28031,6 +28032,98 @@
     <p:extLst>
       <p:ext uri="{BB962C8B-B14F-4D97-AF65-F5344CB8AC3E}">
         <p14:creationId xmlns:p14="http://schemas.microsoft.com/office/powerpoint/2010/main" val="177818121"/>
+      </p:ext>
+    </p:extLst>
+  </p:cSld>
+  <p:clrMapOvr>
+    <a:masterClrMapping/>
+  </p:clrMapOvr>
+</p:sld>
+</file>
+
+<file path=ppt/slides/slide32.xml><?xml version="1.0" encoding="utf-8"?>
+<p:sld xmlns:a="http://schemas.openxmlformats.org/drawingml/2006/main" xmlns:r="http://schemas.openxmlformats.org/officeDocument/2006/relationships" xmlns:p="http://schemas.openxmlformats.org/presentationml/2006/main">
+  <p:cSld>
+    <p:spTree>
+      <p:nvGrpSpPr>
+        <p:cNvPr id="1" name="">
+          <a:extLst>
+            <a:ext uri="{FF2B5EF4-FFF2-40B4-BE49-F238E27FC236}">
+              <a16:creationId xmlns:a16="http://schemas.microsoft.com/office/drawing/2014/main" id="{8A0432E8-3C86-3215-9660-A7694BFD9233}"/>
+            </a:ext>
+          </a:extLst>
+        </p:cNvPr>
+        <p:cNvGrpSpPr/>
+        <p:nvPr/>
+      </p:nvGrpSpPr>
+      <p:grpSpPr>
+        <a:xfrm>
+          <a:off x="0" y="0"/>
+          <a:ext cx="0" cy="0"/>
+          <a:chOff x="0" y="0"/>
+          <a:chExt cx="0" cy="0"/>
+        </a:xfrm>
+      </p:grpSpPr>
+      <p:sp>
+        <p:nvSpPr>
+          <p:cNvPr id="4" name="Title 3">
+            <a:extLst>
+              <a:ext uri="{FF2B5EF4-FFF2-40B4-BE49-F238E27FC236}">
+                <a16:creationId xmlns:a16="http://schemas.microsoft.com/office/drawing/2014/main" id="{5EF159D0-18E4-4B44-C094-86643C385BBD}"/>
+              </a:ext>
+            </a:extLst>
+          </p:cNvPr>
+          <p:cNvSpPr>
+            <a:spLocks noGrp="1"/>
+          </p:cNvSpPr>
+          <p:nvPr>
+            <p:ph type="title"/>
+          </p:nvPr>
+        </p:nvSpPr>
+        <p:spPr/>
+        <p:txBody>
+          <a:bodyPr/>
+          <a:lstStyle/>
+          <a:p>
+            <a:r>
+              <a:rPr lang="en-US" dirty="0"/>
+              <a:t>Comparison on Mazes</a:t>
+            </a:r>
+          </a:p>
+        </p:txBody>
+      </p:sp>
+      <p:sp>
+        <p:nvSpPr>
+          <p:cNvPr id="7" name="Text Placeholder 6">
+            <a:extLst>
+              <a:ext uri="{FF2B5EF4-FFF2-40B4-BE49-F238E27FC236}">
+                <a16:creationId xmlns:a16="http://schemas.microsoft.com/office/drawing/2014/main" id="{A3A7EFAC-8C93-3395-D3FC-C3B761DFA322}"/>
+              </a:ext>
+            </a:extLst>
+          </p:cNvPr>
+          <p:cNvSpPr>
+            <a:spLocks noGrp="1"/>
+          </p:cNvSpPr>
+          <p:nvPr>
+            <p:ph type="body" idx="1"/>
+          </p:nvPr>
+        </p:nvSpPr>
+        <p:spPr/>
+        <p:txBody>
+          <a:bodyPr/>
+          <a:lstStyle/>
+          <a:p>
+            <a:r>
+              <a:rPr lang="en-US" dirty="0"/>
+              <a:t>See Code for Chapter 3</a:t>
+            </a:r>
+          </a:p>
+        </p:txBody>
+      </p:sp>
+    </p:spTree>
+    <p:extLst>
+      <p:ext uri="{BB962C8B-B14F-4D97-AF65-F5344CB8AC3E}">
+        <p14:creationId xmlns:p14="http://schemas.microsoft.com/office/powerpoint/2010/main" val="3133235021"/>
       </p:ext>
     </p:extLst>
   </p:cSld>
